--- a/assets/memos/B6-memo.pptx
+++ b/assets/memos/B6-memo.pptx
@@ -3105,8 +3105,8 @@
         </p:nvSpPr>
         <p:spPr>
           <a:xfrm>
-            <a:off x="648000" y="1180800"/>
-            <a:ext cx="5058000" cy="511200"/>
+            <a:off x="532800" y="1180800"/>
+            <a:ext cx="6490800" cy="511200"/>
           </a:xfrm>
           <a:prstGeom prst="rect">
             <a:avLst/>
@@ -3128,7 +3128,7 @@
               </a:spcAft>
             </a:pPr>
             <a:r>
-              <a:rPr sz="2000" b="1" i="0">
+              <a:rPr sz="1800" b="1" i="0">
                 <a:solidFill>
                   <a:srgbClr val="4388BC"/>
                 </a:solidFill>
@@ -4562,8 +4562,8 @@
         </p:nvSpPr>
         <p:spPr>
           <a:xfrm>
-            <a:off x="648000" y="1180800"/>
-            <a:ext cx="5058000" cy="511200"/>
+            <a:off x="532800" y="1180800"/>
+            <a:ext cx="6490800" cy="511200"/>
           </a:xfrm>
           <a:prstGeom prst="rect">
             <a:avLst/>
@@ -4585,7 +4585,7 @@
               </a:spcAft>
             </a:pPr>
             <a:r>
-              <a:rPr sz="2000" b="1" i="0">
+              <a:rPr sz="1800" b="1" i="0">
                 <a:solidFill>
                   <a:srgbClr val="4388BC"/>
                 </a:solidFill>

--- a/assets/memos/B6-memo.pptx
+++ b/assets/memos/B6-memo.pptx
@@ -3421,7 +3421,7 @@
                 </a:solidFill>
                 <a:latin typeface="Arial"/>
               </a:rPr>
-              <a:t>→ Mon Espace Santé est le service numérique officiel de l'Assurance…</a:t>
+              <a:t>→ Mon Espace Santé est le service numérique officiel de l'Assurance Maladie. Il vous permet de centraliser toutes vos informations de santé en un seul endroit sécurisé, accessible depuis votre ordinateur, tablette ou smartphone.</a:t>
             </a:r>
           </a:p>
           <a:p>
@@ -3459,7 +3459,7 @@
                 </a:solidFill>
                 <a:latin typeface="Arial"/>
               </a:rPr>
-              <a:t>→ Ordonnances, résultats d'analyses, comptes-rendus médicaux — tout…</a:t>
+              <a:t>→ Ordonnances, résultats d'analyses, comptes-rendus médicaux — tout au même endroit.</a:t>
             </a:r>
           </a:p>
         </p:txBody>
@@ -3746,7 +3746,7 @@
                 </a:solidFill>
                 <a:latin typeface="Arial"/>
               </a:rPr>
-              <a:t>→ Vos ordonnances, résultats et comptes-rendus sont stockés numériq…</a:t>
+              <a:t>→ Vos ordonnances, résultats et comptes-rendus sont stockés numériquement. Plus besoin de fouiller dans vos tiroirs avant un rendez-vous médical.</a:t>
             </a:r>
           </a:p>
           <a:p>
@@ -4052,7 +4052,7 @@
                 </a:solidFill>
                 <a:latin typeface="Arial"/>
               </a:rPr>
-              <a:t>→ Le numéro à 15 chiffres figurant sur votre carte Vitale ou votre …</a:t>
+              <a:t>→ Le numéro à 15 chiffres figurant sur votre carte Vitale ou votre attestation d'Assurance Maladie.</a:t>
             </a:r>
           </a:p>
           <a:p>
@@ -4339,7 +4339,7 @@
                 </a:solidFill>
                 <a:latin typeface="Arial"/>
               </a:rPr>
-              <a:t>→ Une fois votre compte créé, vous pouvez vous connecter de deux fa…</a:t>
+              <a:t>→ Une fois votre compte créé, vous pouvez vous connecter de deux façons :</a:t>
             </a:r>
           </a:p>
           <a:p>
@@ -4377,7 +4377,7 @@
                 </a:solidFill>
                 <a:latin typeface="Arial"/>
               </a:rPr>
-              <a:t>→ Utilisez vos identifiants habituels Ameli (numéro de Sécurité Soc…</a:t>
+              <a:t>→ Utilisez vos identifiants habituels Ameli (numéro de Sécurité Sociale + mot de passe). C'est la méthode la plus courante si vous utilisez déjà le site ameli.fr.</a:t>
             </a:r>
           </a:p>
         </p:txBody>
@@ -4897,7 +4897,7 @@
                 </a:solidFill>
                 <a:latin typeface="Arial"/>
               </a:rPr>
-              <a:t>→ Vérifiez que vos coordonnées sont à jour : adresse, téléphone, mé…</a:t>
+              <a:t>→ Vérifiez que vos coordonnées sont à jour : adresse, téléphone, médecin traitant déclaré. Ces informations sont essentielles pour que les professionnels de santé puissent vous contacter.</a:t>
             </a:r>
           </a:p>
           <a:p>
@@ -5490,7 +5490,7 @@
                 </a:solidFill>
                 <a:latin typeface="Arial"/>
               </a:rPr>
-              <a:t>→ Vous restez maître de vos données à tout moment. Mon Espace Santé…</a:t>
+              <a:t>→ Vous restez maître de vos données à tout moment. Mon Espace Santé vous offre un contrôle total sur qui peut consulter vos informations.</a:t>
             </a:r>
           </a:p>
           <a:p>
@@ -5528,7 +5528,7 @@
                 </a:solidFill>
                 <a:latin typeface="Arial"/>
               </a:rPr>
-              <a:t>→ Autorisez vos médecins et pharmaciens à consulter votre dossier l…</a:t>
+              <a:t>→ Autorisez vos médecins et pharmaciens à consulter votre dossier lors d'une visite ou d'une dispensation de médicaments.</a:t>
             </a:r>
           </a:p>
         </p:txBody>

--- a/assets/memos/B6-memo.pptx
+++ b/assets/memos/B6-memo.pptx
@@ -3167,7 +3167,7 @@
         <p:spPr>
           <a:xfrm>
             <a:off x="532800" y="1749600"/>
-            <a:ext cx="6490800" cy="1371600"/>
+            <a:ext cx="6490800" cy="1684800"/>
           </a:xfrm>
           <a:prstGeom prst="rect">
             <a:avLst/>
@@ -3208,7 +3208,7 @@
         <p:spPr>
           <a:xfrm>
             <a:off x="532800" y="1749600"/>
-            <a:ext cx="572400" cy="1371600"/>
+            <a:ext cx="572400" cy="1684800"/>
           </a:xfrm>
           <a:prstGeom prst="rect">
             <a:avLst/>
@@ -3374,7 +3374,7 @@
         <p:spPr>
           <a:xfrm>
             <a:off x="1159200" y="2214000"/>
-            <a:ext cx="5828400" cy="885600"/>
+            <a:ext cx="5828400" cy="1184399"/>
           </a:xfrm>
           <a:prstGeom prst="rect">
             <a:avLst/>
@@ -3472,8 +3472,8 @@
         </p:nvSpPr>
         <p:spPr>
           <a:xfrm>
-            <a:off x="532800" y="3186000"/>
-            <a:ext cx="6490800" cy="1371600"/>
+            <a:off x="532800" y="3499199"/>
+            <a:ext cx="6490800" cy="1382400"/>
           </a:xfrm>
           <a:prstGeom prst="rect">
             <a:avLst/>
@@ -3513,8 +3513,8 @@
         </p:nvSpPr>
         <p:spPr>
           <a:xfrm>
-            <a:off x="532800" y="3186000"/>
-            <a:ext cx="572400" cy="1371600"/>
+            <a:off x="532800" y="3499199"/>
+            <a:ext cx="572400" cy="1382400"/>
           </a:xfrm>
           <a:prstGeom prst="rect">
             <a:avLst/>
@@ -3554,7 +3554,7 @@
         </p:nvSpPr>
         <p:spPr>
           <a:xfrm>
-            <a:off x="1206000" y="3607200"/>
+            <a:off x="1206000" y="3920399"/>
             <a:ext cx="5752800" cy="7200"/>
           </a:xfrm>
           <a:prstGeom prst="rect">
@@ -3595,7 +3595,7 @@
         </p:nvSpPr>
         <p:spPr>
           <a:xfrm>
-            <a:off x="532800" y="3252600"/>
+            <a:off x="532800" y="3565800"/>
             <a:ext cx="572400" cy="288000"/>
           </a:xfrm>
           <a:prstGeom prst="rect">
@@ -3637,7 +3637,7 @@
         </p:nvSpPr>
         <p:spPr>
           <a:xfrm>
-            <a:off x="1177200" y="3221999"/>
+            <a:off x="1177200" y="3535199"/>
             <a:ext cx="5810400" cy="370799"/>
           </a:xfrm>
           <a:prstGeom prst="rect">
@@ -3679,8 +3679,8 @@
         </p:nvSpPr>
         <p:spPr>
           <a:xfrm>
-            <a:off x="1159200" y="3650399"/>
-            <a:ext cx="5828400" cy="885600"/>
+            <a:off x="1159200" y="3963599"/>
+            <a:ext cx="5828400" cy="881999"/>
           </a:xfrm>
           <a:prstGeom prst="rect">
             <a:avLst/>
@@ -3778,8 +3778,8 @@
         </p:nvSpPr>
         <p:spPr>
           <a:xfrm>
-            <a:off x="532800" y="4622400"/>
-            <a:ext cx="6490800" cy="1371600"/>
+            <a:off x="532800" y="4946399"/>
+            <a:ext cx="6490800" cy="1382400"/>
           </a:xfrm>
           <a:prstGeom prst="rect">
             <a:avLst/>
@@ -3819,8 +3819,8 @@
         </p:nvSpPr>
         <p:spPr>
           <a:xfrm>
-            <a:off x="532800" y="4622400"/>
-            <a:ext cx="572400" cy="1371600"/>
+            <a:off x="532800" y="4946399"/>
+            <a:ext cx="572400" cy="1382400"/>
           </a:xfrm>
           <a:prstGeom prst="rect">
             <a:avLst/>
@@ -3860,7 +3860,7 @@
         </p:nvSpPr>
         <p:spPr>
           <a:xfrm>
-            <a:off x="1206000" y="5043600"/>
+            <a:off x="1206000" y="5367599"/>
             <a:ext cx="5752800" cy="7200"/>
           </a:xfrm>
           <a:prstGeom prst="rect">
@@ -3901,7 +3901,7 @@
         </p:nvSpPr>
         <p:spPr>
           <a:xfrm>
-            <a:off x="532800" y="4689000"/>
+            <a:off x="532800" y="5013000"/>
             <a:ext cx="572400" cy="288000"/>
           </a:xfrm>
           <a:prstGeom prst="rect">
@@ -3943,7 +3943,7 @@
         </p:nvSpPr>
         <p:spPr>
           <a:xfrm>
-            <a:off x="1177200" y="4658400"/>
+            <a:off x="1177200" y="4982399"/>
             <a:ext cx="5810400" cy="370799"/>
           </a:xfrm>
           <a:prstGeom prst="rect">
@@ -3985,8 +3985,8 @@
         </p:nvSpPr>
         <p:spPr>
           <a:xfrm>
-            <a:off x="1159200" y="5086800"/>
-            <a:ext cx="5828400" cy="885600"/>
+            <a:off x="1159200" y="5410799"/>
+            <a:ext cx="5828400" cy="881999"/>
           </a:xfrm>
           <a:prstGeom prst="rect">
             <a:avLst/>
@@ -4084,8 +4084,8 @@
         </p:nvSpPr>
         <p:spPr>
           <a:xfrm>
-            <a:off x="532800" y="6058799"/>
-            <a:ext cx="6490800" cy="1371600"/>
+            <a:off x="532800" y="6393599"/>
+            <a:ext cx="6490800" cy="1533600"/>
           </a:xfrm>
           <a:prstGeom prst="rect">
             <a:avLst/>
@@ -4125,8 +4125,8 @@
         </p:nvSpPr>
         <p:spPr>
           <a:xfrm>
-            <a:off x="532800" y="6058799"/>
-            <a:ext cx="572400" cy="1371600"/>
+            <a:off x="532800" y="6393599"/>
+            <a:ext cx="572400" cy="1533600"/>
           </a:xfrm>
           <a:prstGeom prst="rect">
             <a:avLst/>
@@ -4166,7 +4166,7 @@
         </p:nvSpPr>
         <p:spPr>
           <a:xfrm>
-            <a:off x="1206000" y="6480000"/>
+            <a:off x="1206000" y="6814800"/>
             <a:ext cx="5752800" cy="7200"/>
           </a:xfrm>
           <a:prstGeom prst="rect">
@@ -4207,7 +4207,7 @@
         </p:nvSpPr>
         <p:spPr>
           <a:xfrm>
-            <a:off x="532800" y="6125399"/>
+            <a:off x="532800" y="6460199"/>
             <a:ext cx="572400" cy="288000"/>
           </a:xfrm>
           <a:prstGeom prst="rect">
@@ -4249,7 +4249,7 @@
         </p:nvSpPr>
         <p:spPr>
           <a:xfrm>
-            <a:off x="1177200" y="6094800"/>
+            <a:off x="1177200" y="6429600"/>
             <a:ext cx="5810400" cy="370799"/>
           </a:xfrm>
           <a:prstGeom prst="rect">
@@ -4291,8 +4291,8 @@
         </p:nvSpPr>
         <p:spPr>
           <a:xfrm>
-            <a:off x="1159200" y="6523200"/>
-            <a:ext cx="5828400" cy="885600"/>
+            <a:off x="1159200" y="6858000"/>
+            <a:ext cx="5828400" cy="1033199"/>
           </a:xfrm>
           <a:prstGeom prst="rect">
             <a:avLst/>
@@ -4390,7 +4390,7 @@
         </p:nvSpPr>
         <p:spPr>
           <a:xfrm>
-            <a:off x="532800" y="7639200"/>
+            <a:off x="532800" y="8063999"/>
             <a:ext cx="6490800" cy="658800"/>
           </a:xfrm>
           <a:prstGeom prst="rect">
@@ -4433,7 +4433,7 @@
         </p:nvSpPr>
         <p:spPr>
           <a:xfrm>
-            <a:off x="1540799" y="7675200"/>
+            <a:off x="1540799" y="8099999"/>
             <a:ext cx="5410800" cy="604800"/>
           </a:xfrm>
           <a:prstGeom prst="rect">
@@ -4624,7 +4624,7 @@
         <p:spPr>
           <a:xfrm>
             <a:off x="532800" y="1749600"/>
-            <a:ext cx="6490800" cy="1371600"/>
+            <a:ext cx="6490800" cy="1533600"/>
           </a:xfrm>
           <a:prstGeom prst="rect">
             <a:avLst/>
@@ -4665,7 +4665,7 @@
         <p:spPr>
           <a:xfrm>
             <a:off x="532800" y="1749600"/>
-            <a:ext cx="572400" cy="1371600"/>
+            <a:ext cx="572400" cy="1533600"/>
           </a:xfrm>
           <a:prstGeom prst="rect">
             <a:avLst/>
@@ -4831,7 +4831,7 @@
         <p:spPr>
           <a:xfrm>
             <a:off x="1159200" y="2214000"/>
-            <a:ext cx="5828400" cy="885600"/>
+            <a:ext cx="5828400" cy="1033199"/>
           </a:xfrm>
           <a:prstGeom prst="rect">
             <a:avLst/>
@@ -4929,7 +4929,7 @@
         </p:nvSpPr>
         <p:spPr>
           <a:xfrm>
-            <a:off x="532800" y="3186000"/>
+            <a:off x="532800" y="3348000"/>
             <a:ext cx="6490800" cy="1371600"/>
           </a:xfrm>
           <a:prstGeom prst="rect">
@@ -4970,7 +4970,7 @@
         </p:nvSpPr>
         <p:spPr>
           <a:xfrm>
-            <a:off x="532800" y="3186000"/>
+            <a:off x="532800" y="3348000"/>
             <a:ext cx="572400" cy="1371600"/>
           </a:xfrm>
           <a:prstGeom prst="rect">
@@ -5011,7 +5011,7 @@
         </p:nvSpPr>
         <p:spPr>
           <a:xfrm>
-            <a:off x="1206000" y="3607200"/>
+            <a:off x="1206000" y="3769200"/>
             <a:ext cx="5752800" cy="7200"/>
           </a:xfrm>
           <a:prstGeom prst="rect">
@@ -5052,7 +5052,7 @@
         </p:nvSpPr>
         <p:spPr>
           <a:xfrm>
-            <a:off x="532800" y="3252600"/>
+            <a:off x="532800" y="3414600"/>
             <a:ext cx="572400" cy="288000"/>
           </a:xfrm>
           <a:prstGeom prst="rect">
@@ -5094,7 +5094,7 @@
         </p:nvSpPr>
         <p:spPr>
           <a:xfrm>
-            <a:off x="1177200" y="3221999"/>
+            <a:off x="1177200" y="3384000"/>
             <a:ext cx="5810400" cy="370799"/>
           </a:xfrm>
           <a:prstGeom prst="rect">
@@ -5136,8 +5136,8 @@
         </p:nvSpPr>
         <p:spPr>
           <a:xfrm>
-            <a:off x="1159200" y="3650399"/>
-            <a:ext cx="5828400" cy="885600"/>
+            <a:off x="1159200" y="3812400"/>
+            <a:ext cx="5828400" cy="871200"/>
           </a:xfrm>
           <a:prstGeom prst="rect">
             <a:avLst/>
@@ -5235,8 +5235,8 @@
         </p:nvSpPr>
         <p:spPr>
           <a:xfrm>
-            <a:off x="532800" y="4622400"/>
-            <a:ext cx="6490800" cy="1371600"/>
+            <a:off x="532800" y="4784400"/>
+            <a:ext cx="6490800" cy="1533600"/>
           </a:xfrm>
           <a:prstGeom prst="rect">
             <a:avLst/>
@@ -5276,8 +5276,8 @@
         </p:nvSpPr>
         <p:spPr>
           <a:xfrm>
-            <a:off x="532800" y="4622400"/>
-            <a:ext cx="572400" cy="1371600"/>
+            <a:off x="532800" y="4784400"/>
+            <a:ext cx="572400" cy="1533600"/>
           </a:xfrm>
           <a:prstGeom prst="rect">
             <a:avLst/>
@@ -5317,7 +5317,7 @@
         </p:nvSpPr>
         <p:spPr>
           <a:xfrm>
-            <a:off x="1206000" y="5043600"/>
+            <a:off x="1206000" y="5205600"/>
             <a:ext cx="5752800" cy="7200"/>
           </a:xfrm>
           <a:prstGeom prst="rect">
@@ -5358,7 +5358,7 @@
         </p:nvSpPr>
         <p:spPr>
           <a:xfrm>
-            <a:off x="532800" y="4689000"/>
+            <a:off x="532800" y="4851000"/>
             <a:ext cx="572400" cy="288000"/>
           </a:xfrm>
           <a:prstGeom prst="rect">
@@ -5400,7 +5400,7 @@
         </p:nvSpPr>
         <p:spPr>
           <a:xfrm>
-            <a:off x="1177200" y="4658400"/>
+            <a:off x="1177200" y="4820400"/>
             <a:ext cx="5810400" cy="370799"/>
           </a:xfrm>
           <a:prstGeom prst="rect">
@@ -5442,8 +5442,8 @@
         </p:nvSpPr>
         <p:spPr>
           <a:xfrm>
-            <a:off x="1159200" y="5086800"/>
-            <a:ext cx="5828400" cy="885600"/>
+            <a:off x="1159200" y="5248800"/>
+            <a:ext cx="5828400" cy="1033199"/>
           </a:xfrm>
           <a:prstGeom prst="rect">
             <a:avLst/>

--- a/assets/memos/B6-memo.pptx
+++ b/assets/memos/B6-memo.pptx
@@ -3097,9 +3097,35 @@
         <p:nvPr/>
       </p:nvGrpSpPr>
       <p:grpSpPr/>
-      <p:sp>
-        <p:nvSpPr>
-          <p:cNvPr id="2" name="TextBox 1"/>
+      <p:pic>
+        <p:nvPicPr>
+          <p:cNvPr id="2" name="Picture 1" descr="bg-p1.png"/>
+          <p:cNvPicPr>
+            <a:picLocks noChangeAspect="1"/>
+          </p:cNvPicPr>
+          <p:nvPr/>
+        </p:nvPicPr>
+        <p:blipFill>
+          <a:blip r:embed="rId2">
+            <a:alphaModFix amt="80000"/>
+          </a:blip>
+          <a:stretch>
+            <a:fillRect/>
+          </a:stretch>
+        </p:blipFill>
+        <p:spPr>
+          <a:xfrm>
+            <a:off x="0" y="0"/>
+            <a:ext cx="7556399" cy="10692000"/>
+          </a:xfrm>
+          <a:prstGeom prst="rect">
+            <a:avLst/>
+          </a:prstGeom>
+        </p:spPr>
+      </p:pic>
+      <p:sp>
+        <p:nvSpPr>
+          <p:cNvPr id="3" name="TextBox 2"/>
           <p:cNvSpPr txBox="1"/>
           <p:nvPr/>
         </p:nvSpPr>
@@ -3160,7 +3186,7 @@
       </p:sp>
       <p:sp>
         <p:nvSpPr>
-          <p:cNvPr id="3" name="Rectangle 2"/>
+          <p:cNvPr id="4" name="Rectangle 3"/>
           <p:cNvSpPr/>
           <p:nvPr/>
         </p:nvSpPr>
@@ -3201,7 +3227,7 @@
       </p:sp>
       <p:sp>
         <p:nvSpPr>
-          <p:cNvPr id="4" name="Rectangle 3"/>
+          <p:cNvPr id="5" name="Rectangle 4"/>
           <p:cNvSpPr/>
           <p:nvPr/>
         </p:nvSpPr>
@@ -3242,7 +3268,7 @@
       </p:sp>
       <p:sp>
         <p:nvSpPr>
-          <p:cNvPr id="5" name="Rectangle 4"/>
+          <p:cNvPr id="6" name="Rectangle 5"/>
           <p:cNvSpPr/>
           <p:nvPr/>
         </p:nvSpPr>
@@ -3283,7 +3309,7 @@
       </p:sp>
       <p:sp>
         <p:nvSpPr>
-          <p:cNvPr id="6" name="TextBox 5"/>
+          <p:cNvPr id="7" name="TextBox 6"/>
           <p:cNvSpPr txBox="1"/>
           <p:nvPr/>
         </p:nvSpPr>
@@ -3325,7 +3351,7 @@
       </p:sp>
       <p:sp>
         <p:nvSpPr>
-          <p:cNvPr id="7" name="TextBox 6"/>
+          <p:cNvPr id="8" name="TextBox 7"/>
           <p:cNvSpPr txBox="1"/>
           <p:nvPr/>
         </p:nvSpPr>
@@ -3367,7 +3393,7 @@
       </p:sp>
       <p:sp>
         <p:nvSpPr>
-          <p:cNvPr id="8" name="TextBox 7"/>
+          <p:cNvPr id="9" name="TextBox 8"/>
           <p:cNvSpPr txBox="1"/>
           <p:nvPr/>
         </p:nvSpPr>
@@ -3466,7 +3492,7 @@
       </p:sp>
       <p:sp>
         <p:nvSpPr>
-          <p:cNvPr id="9" name="Rectangle 8"/>
+          <p:cNvPr id="10" name="Rectangle 9"/>
           <p:cNvSpPr/>
           <p:nvPr/>
         </p:nvSpPr>
@@ -3507,7 +3533,7 @@
       </p:sp>
       <p:sp>
         <p:nvSpPr>
-          <p:cNvPr id="10" name="Rectangle 9"/>
+          <p:cNvPr id="11" name="Rectangle 10"/>
           <p:cNvSpPr/>
           <p:nvPr/>
         </p:nvSpPr>
@@ -3548,7 +3574,7 @@
       </p:sp>
       <p:sp>
         <p:nvSpPr>
-          <p:cNvPr id="11" name="Rectangle 10"/>
+          <p:cNvPr id="12" name="Rectangle 11"/>
           <p:cNvSpPr/>
           <p:nvPr/>
         </p:nvSpPr>
@@ -3589,7 +3615,7 @@
       </p:sp>
       <p:sp>
         <p:nvSpPr>
-          <p:cNvPr id="12" name="TextBox 11"/>
+          <p:cNvPr id="13" name="TextBox 12"/>
           <p:cNvSpPr txBox="1"/>
           <p:nvPr/>
         </p:nvSpPr>
@@ -3631,7 +3657,7 @@
       </p:sp>
       <p:sp>
         <p:nvSpPr>
-          <p:cNvPr id="13" name="TextBox 12"/>
+          <p:cNvPr id="14" name="TextBox 13"/>
           <p:cNvSpPr txBox="1"/>
           <p:nvPr/>
         </p:nvSpPr>
@@ -3673,7 +3699,7 @@
       </p:sp>
       <p:sp>
         <p:nvSpPr>
-          <p:cNvPr id="14" name="TextBox 13"/>
+          <p:cNvPr id="15" name="TextBox 14"/>
           <p:cNvSpPr txBox="1"/>
           <p:nvPr/>
         </p:nvSpPr>
@@ -3772,7 +3798,7 @@
       </p:sp>
       <p:sp>
         <p:nvSpPr>
-          <p:cNvPr id="15" name="Rectangle 14"/>
+          <p:cNvPr id="16" name="Rectangle 15"/>
           <p:cNvSpPr/>
           <p:nvPr/>
         </p:nvSpPr>
@@ -3813,7 +3839,7 @@
       </p:sp>
       <p:sp>
         <p:nvSpPr>
-          <p:cNvPr id="16" name="Rectangle 15"/>
+          <p:cNvPr id="17" name="Rectangle 16"/>
           <p:cNvSpPr/>
           <p:nvPr/>
         </p:nvSpPr>
@@ -3854,7 +3880,7 @@
       </p:sp>
       <p:sp>
         <p:nvSpPr>
-          <p:cNvPr id="17" name="Rectangle 16"/>
+          <p:cNvPr id="18" name="Rectangle 17"/>
           <p:cNvSpPr/>
           <p:nvPr/>
         </p:nvSpPr>
@@ -3895,7 +3921,7 @@
       </p:sp>
       <p:sp>
         <p:nvSpPr>
-          <p:cNvPr id="18" name="TextBox 17"/>
+          <p:cNvPr id="19" name="TextBox 18"/>
           <p:cNvSpPr txBox="1"/>
           <p:nvPr/>
         </p:nvSpPr>
@@ -3937,7 +3963,7 @@
       </p:sp>
       <p:sp>
         <p:nvSpPr>
-          <p:cNvPr id="19" name="TextBox 18"/>
+          <p:cNvPr id="20" name="TextBox 19"/>
           <p:cNvSpPr txBox="1"/>
           <p:nvPr/>
         </p:nvSpPr>
@@ -3979,7 +4005,7 @@
       </p:sp>
       <p:sp>
         <p:nvSpPr>
-          <p:cNvPr id="20" name="TextBox 19"/>
+          <p:cNvPr id="21" name="TextBox 20"/>
           <p:cNvSpPr txBox="1"/>
           <p:nvPr/>
         </p:nvSpPr>
@@ -4078,7 +4104,7 @@
       </p:sp>
       <p:sp>
         <p:nvSpPr>
-          <p:cNvPr id="21" name="Rectangle 20"/>
+          <p:cNvPr id="22" name="Rectangle 21"/>
           <p:cNvSpPr/>
           <p:nvPr/>
         </p:nvSpPr>
@@ -4119,7 +4145,7 @@
       </p:sp>
       <p:sp>
         <p:nvSpPr>
-          <p:cNvPr id="22" name="Rectangle 21"/>
+          <p:cNvPr id="23" name="Rectangle 22"/>
           <p:cNvSpPr/>
           <p:nvPr/>
         </p:nvSpPr>
@@ -4160,7 +4186,7 @@
       </p:sp>
       <p:sp>
         <p:nvSpPr>
-          <p:cNvPr id="23" name="Rectangle 22"/>
+          <p:cNvPr id="24" name="Rectangle 23"/>
           <p:cNvSpPr/>
           <p:nvPr/>
         </p:nvSpPr>
@@ -4201,7 +4227,7 @@
       </p:sp>
       <p:sp>
         <p:nvSpPr>
-          <p:cNvPr id="24" name="TextBox 23"/>
+          <p:cNvPr id="25" name="TextBox 24"/>
           <p:cNvSpPr txBox="1"/>
           <p:nvPr/>
         </p:nvSpPr>
@@ -4243,7 +4269,7 @@
       </p:sp>
       <p:sp>
         <p:nvSpPr>
-          <p:cNvPr id="25" name="TextBox 24"/>
+          <p:cNvPr id="26" name="TextBox 25"/>
           <p:cNvSpPr txBox="1"/>
           <p:nvPr/>
         </p:nvSpPr>
@@ -4285,7 +4311,7 @@
       </p:sp>
       <p:sp>
         <p:nvSpPr>
-          <p:cNvPr id="26" name="TextBox 25"/>
+          <p:cNvPr id="27" name="TextBox 26"/>
           <p:cNvSpPr txBox="1"/>
           <p:nvPr/>
         </p:nvSpPr>
@@ -4384,7 +4410,7 @@
       </p:sp>
       <p:sp>
         <p:nvSpPr>
-          <p:cNvPr id="27" name="Rectangle 26"/>
+          <p:cNvPr id="28" name="Rectangle 27"/>
           <p:cNvSpPr/>
           <p:nvPr/>
         </p:nvSpPr>
@@ -4427,7 +4453,7 @@
       </p:sp>
       <p:sp>
         <p:nvSpPr>
-          <p:cNvPr id="28" name="TextBox 27"/>
+          <p:cNvPr id="29" name="TextBox 28"/>
           <p:cNvSpPr txBox="1"/>
           <p:nvPr/>
         </p:nvSpPr>
@@ -4488,7 +4514,7 @@
       </p:sp>
       <p:sp>
         <p:nvSpPr>
-          <p:cNvPr id="29" name="TextBox 28"/>
+          <p:cNvPr id="30" name="TextBox 29"/>
           <p:cNvSpPr txBox="1"/>
           <p:nvPr/>
         </p:nvSpPr>
@@ -4554,9 +4580,35 @@
         <p:nvPr/>
       </p:nvGrpSpPr>
       <p:grpSpPr/>
-      <p:sp>
-        <p:nvSpPr>
-          <p:cNvPr id="2" name="TextBox 1"/>
+      <p:pic>
+        <p:nvPicPr>
+          <p:cNvPr id="2" name="Picture 1" descr="bg-p2.png"/>
+          <p:cNvPicPr>
+            <a:picLocks noChangeAspect="1"/>
+          </p:cNvPicPr>
+          <p:nvPr/>
+        </p:nvPicPr>
+        <p:blipFill>
+          <a:blip r:embed="rId2">
+            <a:alphaModFix amt="80000"/>
+          </a:blip>
+          <a:stretch>
+            <a:fillRect/>
+          </a:stretch>
+        </p:blipFill>
+        <p:spPr>
+          <a:xfrm>
+            <a:off x="0" y="0"/>
+            <a:ext cx="7556399" cy="10692000"/>
+          </a:xfrm>
+          <a:prstGeom prst="rect">
+            <a:avLst/>
+          </a:prstGeom>
+        </p:spPr>
+      </p:pic>
+      <p:sp>
+        <p:nvSpPr>
+          <p:cNvPr id="3" name="TextBox 2"/>
           <p:cNvSpPr txBox="1"/>
           <p:nvPr/>
         </p:nvSpPr>
@@ -4617,7 +4669,7 @@
       </p:sp>
       <p:sp>
         <p:nvSpPr>
-          <p:cNvPr id="3" name="Rectangle 2"/>
+          <p:cNvPr id="4" name="Rectangle 3"/>
           <p:cNvSpPr/>
           <p:nvPr/>
         </p:nvSpPr>
@@ -4658,7 +4710,7 @@
       </p:sp>
       <p:sp>
         <p:nvSpPr>
-          <p:cNvPr id="4" name="Rectangle 3"/>
+          <p:cNvPr id="5" name="Rectangle 4"/>
           <p:cNvSpPr/>
           <p:nvPr/>
         </p:nvSpPr>
@@ -4699,7 +4751,7 @@
       </p:sp>
       <p:sp>
         <p:nvSpPr>
-          <p:cNvPr id="5" name="Rectangle 4"/>
+          <p:cNvPr id="6" name="Rectangle 5"/>
           <p:cNvSpPr/>
           <p:nvPr/>
         </p:nvSpPr>
@@ -4740,7 +4792,7 @@
       </p:sp>
       <p:sp>
         <p:nvSpPr>
-          <p:cNvPr id="6" name="TextBox 5"/>
+          <p:cNvPr id="7" name="TextBox 6"/>
           <p:cNvSpPr txBox="1"/>
           <p:nvPr/>
         </p:nvSpPr>
@@ -4782,7 +4834,7 @@
       </p:sp>
       <p:sp>
         <p:nvSpPr>
-          <p:cNvPr id="7" name="TextBox 6"/>
+          <p:cNvPr id="8" name="TextBox 7"/>
           <p:cNvSpPr txBox="1"/>
           <p:nvPr/>
         </p:nvSpPr>
@@ -4824,7 +4876,7 @@
       </p:sp>
       <p:sp>
         <p:nvSpPr>
-          <p:cNvPr id="8" name="TextBox 7"/>
+          <p:cNvPr id="9" name="TextBox 8"/>
           <p:cNvSpPr txBox="1"/>
           <p:nvPr/>
         </p:nvSpPr>
@@ -4923,7 +4975,7 @@
       </p:sp>
       <p:sp>
         <p:nvSpPr>
-          <p:cNvPr id="9" name="Rectangle 8"/>
+          <p:cNvPr id="10" name="Rectangle 9"/>
           <p:cNvSpPr/>
           <p:nvPr/>
         </p:nvSpPr>
@@ -4964,7 +5016,7 @@
       </p:sp>
       <p:sp>
         <p:nvSpPr>
-          <p:cNvPr id="10" name="Rectangle 9"/>
+          <p:cNvPr id="11" name="Rectangle 10"/>
           <p:cNvSpPr/>
           <p:nvPr/>
         </p:nvSpPr>
@@ -5005,7 +5057,7 @@
       </p:sp>
       <p:sp>
         <p:nvSpPr>
-          <p:cNvPr id="11" name="Rectangle 10"/>
+          <p:cNvPr id="12" name="Rectangle 11"/>
           <p:cNvSpPr/>
           <p:nvPr/>
         </p:nvSpPr>
@@ -5046,7 +5098,7 @@
       </p:sp>
       <p:sp>
         <p:nvSpPr>
-          <p:cNvPr id="12" name="TextBox 11"/>
+          <p:cNvPr id="13" name="TextBox 12"/>
           <p:cNvSpPr txBox="1"/>
           <p:nvPr/>
         </p:nvSpPr>
@@ -5088,7 +5140,7 @@
       </p:sp>
       <p:sp>
         <p:nvSpPr>
-          <p:cNvPr id="13" name="TextBox 12"/>
+          <p:cNvPr id="14" name="TextBox 13"/>
           <p:cNvSpPr txBox="1"/>
           <p:nvPr/>
         </p:nvSpPr>
@@ -5130,7 +5182,7 @@
       </p:sp>
       <p:sp>
         <p:nvSpPr>
-          <p:cNvPr id="14" name="TextBox 13"/>
+          <p:cNvPr id="15" name="TextBox 14"/>
           <p:cNvSpPr txBox="1"/>
           <p:nvPr/>
         </p:nvSpPr>
@@ -5229,7 +5281,7 @@
       </p:sp>
       <p:sp>
         <p:nvSpPr>
-          <p:cNvPr id="15" name="Rectangle 14"/>
+          <p:cNvPr id="16" name="Rectangle 15"/>
           <p:cNvSpPr/>
           <p:nvPr/>
         </p:nvSpPr>
@@ -5270,7 +5322,7 @@
       </p:sp>
       <p:sp>
         <p:nvSpPr>
-          <p:cNvPr id="16" name="Rectangle 15"/>
+          <p:cNvPr id="17" name="Rectangle 16"/>
           <p:cNvSpPr/>
           <p:nvPr/>
         </p:nvSpPr>
@@ -5311,7 +5363,7 @@
       </p:sp>
       <p:sp>
         <p:nvSpPr>
-          <p:cNvPr id="17" name="Rectangle 16"/>
+          <p:cNvPr id="18" name="Rectangle 17"/>
           <p:cNvSpPr/>
           <p:nvPr/>
         </p:nvSpPr>
@@ -5352,7 +5404,7 @@
       </p:sp>
       <p:sp>
         <p:nvSpPr>
-          <p:cNvPr id="18" name="TextBox 17"/>
+          <p:cNvPr id="19" name="TextBox 18"/>
           <p:cNvSpPr txBox="1"/>
           <p:nvPr/>
         </p:nvSpPr>
@@ -5394,7 +5446,7 @@
       </p:sp>
       <p:sp>
         <p:nvSpPr>
-          <p:cNvPr id="19" name="TextBox 18"/>
+          <p:cNvPr id="20" name="TextBox 19"/>
           <p:cNvSpPr txBox="1"/>
           <p:nvPr/>
         </p:nvSpPr>
@@ -5436,7 +5488,7 @@
       </p:sp>
       <p:sp>
         <p:nvSpPr>
-          <p:cNvPr id="20" name="TextBox 19"/>
+          <p:cNvPr id="21" name="TextBox 20"/>
           <p:cNvSpPr txBox="1"/>
           <p:nvPr/>
         </p:nvSpPr>
@@ -5535,7 +5587,7 @@
       </p:sp>
       <p:sp>
         <p:nvSpPr>
-          <p:cNvPr id="21" name="Rectangle 20"/>
+          <p:cNvPr id="22" name="Rectangle 21"/>
           <p:cNvSpPr/>
           <p:nvPr/>
         </p:nvSpPr>
@@ -5578,7 +5630,7 @@
       </p:sp>
       <p:sp>
         <p:nvSpPr>
-          <p:cNvPr id="22" name="Rectangle 21"/>
+          <p:cNvPr id="23" name="Rectangle 22"/>
           <p:cNvSpPr/>
           <p:nvPr/>
         </p:nvSpPr>
@@ -5619,7 +5671,7 @@
       </p:sp>
       <p:sp>
         <p:nvSpPr>
-          <p:cNvPr id="23" name="TextBox 22"/>
+          <p:cNvPr id="24" name="TextBox 23"/>
           <p:cNvSpPr txBox="1"/>
           <p:nvPr/>
         </p:nvSpPr>
@@ -5737,7 +5789,7 @@
       </p:sp>
       <p:sp>
         <p:nvSpPr>
-          <p:cNvPr id="24" name="TextBox 23"/>
+          <p:cNvPr id="25" name="TextBox 24"/>
           <p:cNvSpPr txBox="1"/>
           <p:nvPr/>
         </p:nvSpPr>

--- a/assets/memos/B6-memo.pptx
+++ b/assets/memos/B6-memo.pptx
@@ -3084,9 +3084,12 @@
   <p:cSld>
     <p:bg>
       <p:bgPr>
-        <a:solidFill>
-          <a:srgbClr val="FFFFFF"/>
-        </a:solidFill>
+        <a:blipFill>
+          <a:blip r:embed="rId2"/>
+          <a:stretch>
+            <a:fillRect/>
+          </a:stretch>
+        </a:blipFill>
         <a:effectLst/>
       </p:bgPr>
     </p:bg>
@@ -3097,35 +3100,9 @@
         <p:nvPr/>
       </p:nvGrpSpPr>
       <p:grpSpPr/>
-      <p:pic>
-        <p:nvPicPr>
-          <p:cNvPr id="2" name="Picture 1" descr="bg-p1.png"/>
-          <p:cNvPicPr>
-            <a:picLocks noChangeAspect="1"/>
-          </p:cNvPicPr>
-          <p:nvPr/>
-        </p:nvPicPr>
-        <p:blipFill>
-          <a:blip r:embed="rId2">
-            <a:alphaModFix amt="80000"/>
-          </a:blip>
-          <a:stretch>
-            <a:fillRect/>
-          </a:stretch>
-        </p:blipFill>
-        <p:spPr>
-          <a:xfrm>
-            <a:off x="0" y="0"/>
-            <a:ext cx="7556399" cy="10692000"/>
-          </a:xfrm>
-          <a:prstGeom prst="rect">
-            <a:avLst/>
-          </a:prstGeom>
-        </p:spPr>
-      </p:pic>
-      <p:sp>
-        <p:nvSpPr>
-          <p:cNvPr id="3" name="TextBox 2"/>
+      <p:sp>
+        <p:nvSpPr>
+          <p:cNvPr id="2" name="TextBox 1"/>
           <p:cNvSpPr txBox="1"/>
           <p:nvPr/>
         </p:nvSpPr>
@@ -3186,7 +3163,7 @@
       </p:sp>
       <p:sp>
         <p:nvSpPr>
-          <p:cNvPr id="4" name="Rectangle 3"/>
+          <p:cNvPr id="3" name="Rectangle 2"/>
           <p:cNvSpPr/>
           <p:nvPr/>
         </p:nvSpPr>
@@ -3227,7 +3204,7 @@
       </p:sp>
       <p:sp>
         <p:nvSpPr>
-          <p:cNvPr id="5" name="Rectangle 4"/>
+          <p:cNvPr id="4" name="Rectangle 3"/>
           <p:cNvSpPr/>
           <p:nvPr/>
         </p:nvSpPr>
@@ -3268,7 +3245,7 @@
       </p:sp>
       <p:sp>
         <p:nvSpPr>
-          <p:cNvPr id="6" name="Rectangle 5"/>
+          <p:cNvPr id="5" name="Rectangle 4"/>
           <p:cNvSpPr/>
           <p:nvPr/>
         </p:nvSpPr>
@@ -3309,7 +3286,7 @@
       </p:sp>
       <p:sp>
         <p:nvSpPr>
-          <p:cNvPr id="7" name="TextBox 6"/>
+          <p:cNvPr id="6" name="TextBox 5"/>
           <p:cNvSpPr txBox="1"/>
           <p:nvPr/>
         </p:nvSpPr>
@@ -3351,7 +3328,7 @@
       </p:sp>
       <p:sp>
         <p:nvSpPr>
-          <p:cNvPr id="8" name="TextBox 7"/>
+          <p:cNvPr id="7" name="TextBox 6"/>
           <p:cNvSpPr txBox="1"/>
           <p:nvPr/>
         </p:nvSpPr>
@@ -3393,7 +3370,7 @@
       </p:sp>
       <p:sp>
         <p:nvSpPr>
-          <p:cNvPr id="9" name="TextBox 8"/>
+          <p:cNvPr id="8" name="TextBox 7"/>
           <p:cNvSpPr txBox="1"/>
           <p:nvPr/>
         </p:nvSpPr>
@@ -3492,7 +3469,7 @@
       </p:sp>
       <p:sp>
         <p:nvSpPr>
-          <p:cNvPr id="10" name="Rectangle 9"/>
+          <p:cNvPr id="9" name="Rectangle 8"/>
           <p:cNvSpPr/>
           <p:nvPr/>
         </p:nvSpPr>
@@ -3533,7 +3510,7 @@
       </p:sp>
       <p:sp>
         <p:nvSpPr>
-          <p:cNvPr id="11" name="Rectangle 10"/>
+          <p:cNvPr id="10" name="Rectangle 9"/>
           <p:cNvSpPr/>
           <p:nvPr/>
         </p:nvSpPr>
@@ -3574,7 +3551,7 @@
       </p:sp>
       <p:sp>
         <p:nvSpPr>
-          <p:cNvPr id="12" name="Rectangle 11"/>
+          <p:cNvPr id="11" name="Rectangle 10"/>
           <p:cNvSpPr/>
           <p:nvPr/>
         </p:nvSpPr>
@@ -3615,7 +3592,7 @@
       </p:sp>
       <p:sp>
         <p:nvSpPr>
-          <p:cNvPr id="13" name="TextBox 12"/>
+          <p:cNvPr id="12" name="TextBox 11"/>
           <p:cNvSpPr txBox="1"/>
           <p:nvPr/>
         </p:nvSpPr>
@@ -3657,7 +3634,7 @@
       </p:sp>
       <p:sp>
         <p:nvSpPr>
-          <p:cNvPr id="14" name="TextBox 13"/>
+          <p:cNvPr id="13" name="TextBox 12"/>
           <p:cNvSpPr txBox="1"/>
           <p:nvPr/>
         </p:nvSpPr>
@@ -3699,7 +3676,7 @@
       </p:sp>
       <p:sp>
         <p:nvSpPr>
-          <p:cNvPr id="15" name="TextBox 14"/>
+          <p:cNvPr id="14" name="TextBox 13"/>
           <p:cNvSpPr txBox="1"/>
           <p:nvPr/>
         </p:nvSpPr>
@@ -3798,7 +3775,7 @@
       </p:sp>
       <p:sp>
         <p:nvSpPr>
-          <p:cNvPr id="16" name="Rectangle 15"/>
+          <p:cNvPr id="15" name="Rectangle 14"/>
           <p:cNvSpPr/>
           <p:nvPr/>
         </p:nvSpPr>
@@ -3839,7 +3816,7 @@
       </p:sp>
       <p:sp>
         <p:nvSpPr>
-          <p:cNvPr id="17" name="Rectangle 16"/>
+          <p:cNvPr id="16" name="Rectangle 15"/>
           <p:cNvSpPr/>
           <p:nvPr/>
         </p:nvSpPr>
@@ -3880,7 +3857,7 @@
       </p:sp>
       <p:sp>
         <p:nvSpPr>
-          <p:cNvPr id="18" name="Rectangle 17"/>
+          <p:cNvPr id="17" name="Rectangle 16"/>
           <p:cNvSpPr/>
           <p:nvPr/>
         </p:nvSpPr>
@@ -3921,7 +3898,7 @@
       </p:sp>
       <p:sp>
         <p:nvSpPr>
-          <p:cNvPr id="19" name="TextBox 18"/>
+          <p:cNvPr id="18" name="TextBox 17"/>
           <p:cNvSpPr txBox="1"/>
           <p:nvPr/>
         </p:nvSpPr>
@@ -3963,7 +3940,7 @@
       </p:sp>
       <p:sp>
         <p:nvSpPr>
-          <p:cNvPr id="20" name="TextBox 19"/>
+          <p:cNvPr id="19" name="TextBox 18"/>
           <p:cNvSpPr txBox="1"/>
           <p:nvPr/>
         </p:nvSpPr>
@@ -4005,7 +3982,7 @@
       </p:sp>
       <p:sp>
         <p:nvSpPr>
-          <p:cNvPr id="21" name="TextBox 20"/>
+          <p:cNvPr id="20" name="TextBox 19"/>
           <p:cNvSpPr txBox="1"/>
           <p:nvPr/>
         </p:nvSpPr>
@@ -4104,7 +4081,7 @@
       </p:sp>
       <p:sp>
         <p:nvSpPr>
-          <p:cNvPr id="22" name="Rectangle 21"/>
+          <p:cNvPr id="21" name="Rectangle 20"/>
           <p:cNvSpPr/>
           <p:nvPr/>
         </p:nvSpPr>
@@ -4145,7 +4122,7 @@
       </p:sp>
       <p:sp>
         <p:nvSpPr>
-          <p:cNvPr id="23" name="Rectangle 22"/>
+          <p:cNvPr id="22" name="Rectangle 21"/>
           <p:cNvSpPr/>
           <p:nvPr/>
         </p:nvSpPr>
@@ -4186,7 +4163,7 @@
       </p:sp>
       <p:sp>
         <p:nvSpPr>
-          <p:cNvPr id="24" name="Rectangle 23"/>
+          <p:cNvPr id="23" name="Rectangle 22"/>
           <p:cNvSpPr/>
           <p:nvPr/>
         </p:nvSpPr>
@@ -4227,7 +4204,7 @@
       </p:sp>
       <p:sp>
         <p:nvSpPr>
-          <p:cNvPr id="25" name="TextBox 24"/>
+          <p:cNvPr id="24" name="TextBox 23"/>
           <p:cNvSpPr txBox="1"/>
           <p:nvPr/>
         </p:nvSpPr>
@@ -4269,7 +4246,7 @@
       </p:sp>
       <p:sp>
         <p:nvSpPr>
-          <p:cNvPr id="26" name="TextBox 25"/>
+          <p:cNvPr id="25" name="TextBox 24"/>
           <p:cNvSpPr txBox="1"/>
           <p:nvPr/>
         </p:nvSpPr>
@@ -4311,7 +4288,7 @@
       </p:sp>
       <p:sp>
         <p:nvSpPr>
-          <p:cNvPr id="27" name="TextBox 26"/>
+          <p:cNvPr id="26" name="TextBox 25"/>
           <p:cNvSpPr txBox="1"/>
           <p:nvPr/>
         </p:nvSpPr>
@@ -4410,7 +4387,7 @@
       </p:sp>
       <p:sp>
         <p:nvSpPr>
-          <p:cNvPr id="28" name="Rectangle 27"/>
+          <p:cNvPr id="27" name="Rectangle 26"/>
           <p:cNvSpPr/>
           <p:nvPr/>
         </p:nvSpPr>
@@ -4453,7 +4430,7 @@
       </p:sp>
       <p:sp>
         <p:nvSpPr>
-          <p:cNvPr id="29" name="TextBox 28"/>
+          <p:cNvPr id="28" name="TextBox 27"/>
           <p:cNvSpPr txBox="1"/>
           <p:nvPr/>
         </p:nvSpPr>
@@ -4514,7 +4491,7 @@
       </p:sp>
       <p:sp>
         <p:nvSpPr>
-          <p:cNvPr id="30" name="TextBox 29"/>
+          <p:cNvPr id="29" name="TextBox 28"/>
           <p:cNvSpPr txBox="1"/>
           <p:nvPr/>
         </p:nvSpPr>
@@ -4567,9 +4544,12 @@
   <p:cSld>
     <p:bg>
       <p:bgPr>
-        <a:solidFill>
-          <a:srgbClr val="FFFFFF"/>
-        </a:solidFill>
+        <a:blipFill>
+          <a:blip r:embed="rId2"/>
+          <a:stretch>
+            <a:fillRect/>
+          </a:stretch>
+        </a:blipFill>
         <a:effectLst/>
       </p:bgPr>
     </p:bg>
@@ -4580,35 +4560,9 @@
         <p:nvPr/>
       </p:nvGrpSpPr>
       <p:grpSpPr/>
-      <p:pic>
-        <p:nvPicPr>
-          <p:cNvPr id="2" name="Picture 1" descr="bg-p2.png"/>
-          <p:cNvPicPr>
-            <a:picLocks noChangeAspect="1"/>
-          </p:cNvPicPr>
-          <p:nvPr/>
-        </p:nvPicPr>
-        <p:blipFill>
-          <a:blip r:embed="rId2">
-            <a:alphaModFix amt="80000"/>
-          </a:blip>
-          <a:stretch>
-            <a:fillRect/>
-          </a:stretch>
-        </p:blipFill>
-        <p:spPr>
-          <a:xfrm>
-            <a:off x="0" y="0"/>
-            <a:ext cx="7556399" cy="10692000"/>
-          </a:xfrm>
-          <a:prstGeom prst="rect">
-            <a:avLst/>
-          </a:prstGeom>
-        </p:spPr>
-      </p:pic>
-      <p:sp>
-        <p:nvSpPr>
-          <p:cNvPr id="3" name="TextBox 2"/>
+      <p:sp>
+        <p:nvSpPr>
+          <p:cNvPr id="2" name="TextBox 1"/>
           <p:cNvSpPr txBox="1"/>
           <p:nvPr/>
         </p:nvSpPr>
@@ -4669,7 +4623,7 @@
       </p:sp>
       <p:sp>
         <p:nvSpPr>
-          <p:cNvPr id="4" name="Rectangle 3"/>
+          <p:cNvPr id="3" name="Rectangle 2"/>
           <p:cNvSpPr/>
           <p:nvPr/>
         </p:nvSpPr>
@@ -4710,7 +4664,7 @@
       </p:sp>
       <p:sp>
         <p:nvSpPr>
-          <p:cNvPr id="5" name="Rectangle 4"/>
+          <p:cNvPr id="4" name="Rectangle 3"/>
           <p:cNvSpPr/>
           <p:nvPr/>
         </p:nvSpPr>
@@ -4751,7 +4705,7 @@
       </p:sp>
       <p:sp>
         <p:nvSpPr>
-          <p:cNvPr id="6" name="Rectangle 5"/>
+          <p:cNvPr id="5" name="Rectangle 4"/>
           <p:cNvSpPr/>
           <p:nvPr/>
         </p:nvSpPr>
@@ -4792,7 +4746,7 @@
       </p:sp>
       <p:sp>
         <p:nvSpPr>
-          <p:cNvPr id="7" name="TextBox 6"/>
+          <p:cNvPr id="6" name="TextBox 5"/>
           <p:cNvSpPr txBox="1"/>
           <p:nvPr/>
         </p:nvSpPr>
@@ -4834,7 +4788,7 @@
       </p:sp>
       <p:sp>
         <p:nvSpPr>
-          <p:cNvPr id="8" name="TextBox 7"/>
+          <p:cNvPr id="7" name="TextBox 6"/>
           <p:cNvSpPr txBox="1"/>
           <p:nvPr/>
         </p:nvSpPr>
@@ -4876,7 +4830,7 @@
       </p:sp>
       <p:sp>
         <p:nvSpPr>
-          <p:cNvPr id="9" name="TextBox 8"/>
+          <p:cNvPr id="8" name="TextBox 7"/>
           <p:cNvSpPr txBox="1"/>
           <p:nvPr/>
         </p:nvSpPr>
@@ -4975,7 +4929,7 @@
       </p:sp>
       <p:sp>
         <p:nvSpPr>
-          <p:cNvPr id="10" name="Rectangle 9"/>
+          <p:cNvPr id="9" name="Rectangle 8"/>
           <p:cNvSpPr/>
           <p:nvPr/>
         </p:nvSpPr>
@@ -5016,7 +4970,7 @@
       </p:sp>
       <p:sp>
         <p:nvSpPr>
-          <p:cNvPr id="11" name="Rectangle 10"/>
+          <p:cNvPr id="10" name="Rectangle 9"/>
           <p:cNvSpPr/>
           <p:nvPr/>
         </p:nvSpPr>
@@ -5057,7 +5011,7 @@
       </p:sp>
       <p:sp>
         <p:nvSpPr>
-          <p:cNvPr id="12" name="Rectangle 11"/>
+          <p:cNvPr id="11" name="Rectangle 10"/>
           <p:cNvSpPr/>
           <p:nvPr/>
         </p:nvSpPr>
@@ -5098,7 +5052,7 @@
       </p:sp>
       <p:sp>
         <p:nvSpPr>
-          <p:cNvPr id="13" name="TextBox 12"/>
+          <p:cNvPr id="12" name="TextBox 11"/>
           <p:cNvSpPr txBox="1"/>
           <p:nvPr/>
         </p:nvSpPr>
@@ -5140,7 +5094,7 @@
       </p:sp>
       <p:sp>
         <p:nvSpPr>
-          <p:cNvPr id="14" name="TextBox 13"/>
+          <p:cNvPr id="13" name="TextBox 12"/>
           <p:cNvSpPr txBox="1"/>
           <p:nvPr/>
         </p:nvSpPr>
@@ -5182,7 +5136,7 @@
       </p:sp>
       <p:sp>
         <p:nvSpPr>
-          <p:cNvPr id="15" name="TextBox 14"/>
+          <p:cNvPr id="14" name="TextBox 13"/>
           <p:cNvSpPr txBox="1"/>
           <p:nvPr/>
         </p:nvSpPr>
@@ -5281,7 +5235,7 @@
       </p:sp>
       <p:sp>
         <p:nvSpPr>
-          <p:cNvPr id="16" name="Rectangle 15"/>
+          <p:cNvPr id="15" name="Rectangle 14"/>
           <p:cNvSpPr/>
           <p:nvPr/>
         </p:nvSpPr>
@@ -5322,7 +5276,7 @@
       </p:sp>
       <p:sp>
         <p:nvSpPr>
-          <p:cNvPr id="17" name="Rectangle 16"/>
+          <p:cNvPr id="16" name="Rectangle 15"/>
           <p:cNvSpPr/>
           <p:nvPr/>
         </p:nvSpPr>
@@ -5363,7 +5317,7 @@
       </p:sp>
       <p:sp>
         <p:nvSpPr>
-          <p:cNvPr id="18" name="Rectangle 17"/>
+          <p:cNvPr id="17" name="Rectangle 16"/>
           <p:cNvSpPr/>
           <p:nvPr/>
         </p:nvSpPr>
@@ -5404,7 +5358,7 @@
       </p:sp>
       <p:sp>
         <p:nvSpPr>
-          <p:cNvPr id="19" name="TextBox 18"/>
+          <p:cNvPr id="18" name="TextBox 17"/>
           <p:cNvSpPr txBox="1"/>
           <p:nvPr/>
         </p:nvSpPr>
@@ -5446,7 +5400,7 @@
       </p:sp>
       <p:sp>
         <p:nvSpPr>
-          <p:cNvPr id="20" name="TextBox 19"/>
+          <p:cNvPr id="19" name="TextBox 18"/>
           <p:cNvSpPr txBox="1"/>
           <p:nvPr/>
         </p:nvSpPr>
@@ -5488,7 +5442,7 @@
       </p:sp>
       <p:sp>
         <p:nvSpPr>
-          <p:cNvPr id="21" name="TextBox 20"/>
+          <p:cNvPr id="20" name="TextBox 19"/>
           <p:cNvSpPr txBox="1"/>
           <p:nvPr/>
         </p:nvSpPr>
@@ -5587,7 +5541,7 @@
       </p:sp>
       <p:sp>
         <p:nvSpPr>
-          <p:cNvPr id="22" name="Rectangle 21"/>
+          <p:cNvPr id="21" name="Rectangle 20"/>
           <p:cNvSpPr/>
           <p:nvPr/>
         </p:nvSpPr>
@@ -5630,7 +5584,7 @@
       </p:sp>
       <p:sp>
         <p:nvSpPr>
-          <p:cNvPr id="23" name="Rectangle 22"/>
+          <p:cNvPr id="22" name="Rectangle 21"/>
           <p:cNvSpPr/>
           <p:nvPr/>
         </p:nvSpPr>
@@ -5671,7 +5625,7 @@
       </p:sp>
       <p:sp>
         <p:nvSpPr>
-          <p:cNvPr id="24" name="TextBox 23"/>
+          <p:cNvPr id="23" name="TextBox 22"/>
           <p:cNvSpPr txBox="1"/>
           <p:nvPr/>
         </p:nvSpPr>
@@ -5789,7 +5743,7 @@
       </p:sp>
       <p:sp>
         <p:nvSpPr>
-          <p:cNvPr id="25" name="TextBox 24"/>
+          <p:cNvPr id="24" name="TextBox 23"/>
           <p:cNvSpPr txBox="1"/>
           <p:nvPr/>
         </p:nvSpPr>

--- a/assets/memos/B6-memo.pptx
+++ b/assets/memos/B6-memo.pptx
@@ -4088,7 +4088,7 @@
         <p:spPr>
           <a:xfrm>
             <a:off x="532800" y="6393599"/>
-            <a:ext cx="6490800" cy="1533600"/>
+            <a:ext cx="6490800" cy="1371600"/>
           </a:xfrm>
           <a:prstGeom prst="rect">
             <a:avLst/>
@@ -4129,7 +4129,7 @@
         <p:spPr>
           <a:xfrm>
             <a:off x="532800" y="6393599"/>
-            <a:ext cx="572400" cy="1533600"/>
+            <a:ext cx="572400" cy="1371600"/>
           </a:xfrm>
           <a:prstGeom prst="rect">
             <a:avLst/>
@@ -4295,7 +4295,7 @@
         <p:spPr>
           <a:xfrm>
             <a:off x="1159200" y="6858000"/>
-            <a:ext cx="5828400" cy="1033199"/>
+            <a:ext cx="5828400" cy="871200"/>
           </a:xfrm>
           <a:prstGeom prst="rect">
             <a:avLst/>
@@ -4342,7 +4342,7 @@
                 </a:solidFill>
                 <a:latin typeface="Arial"/>
               </a:rPr>
-              <a:t>→ Une fois votre compte créé, vous pouvez vous connecter de deux façons :</a:t>
+              <a:t>→ Une fois votre compte créé, vous pouvez vous connecter</a:t>
             </a:r>
           </a:p>
           <a:p>
@@ -4361,7 +4361,7 @@
                 </a:solidFill>
                 <a:latin typeface="Arial"/>
               </a:rPr>
-              <a:t>→ Via votre compte Ameli</a:t>
+              <a:t>→ de deux façons :</a:t>
             </a:r>
           </a:p>
           <a:p>
@@ -4380,7 +4380,7 @@
                 </a:solidFill>
                 <a:latin typeface="Arial"/>
               </a:rPr>
-              <a:t>→ Utilisez vos identifiants habituels Ameli (numéro de Sécurité Sociale + mot de passe). C'est la méthode la plus courante si vous utilisez déjà le site ameli.fr.</a:t>
+              <a:t>→ Via votre compte Ameli</a:t>
             </a:r>
           </a:p>
         </p:txBody>
@@ -4393,7 +4393,7 @@
         </p:nvSpPr>
         <p:spPr>
           <a:xfrm>
-            <a:off x="532800" y="8063999"/>
+            <a:off x="532800" y="7901999"/>
             <a:ext cx="6490800" cy="658800"/>
           </a:xfrm>
           <a:prstGeom prst="rect">
@@ -4436,7 +4436,7 @@
         </p:nvSpPr>
         <p:spPr>
           <a:xfrm>
-            <a:off x="1540799" y="8099999"/>
+            <a:off x="1540799" y="7937999"/>
             <a:ext cx="5410800" cy="604800"/>
           </a:xfrm>
           <a:prstGeom prst="rect">
